--- a/practice/bai-1-the-thuc.pptx
+++ b/practice/bai-1-the-thuc.pptx
@@ -1876,7 +1876,7 @@
       </p:sp>
       <p:pic>
         <p:nvPicPr>
-          <p:cNvPr id="3" name="Image 0" descr="/home/user/comdraft/assets/img/dau-huong.png">    </p:cNvPr>
+          <p:cNvPr id="3" name="Image 0" descr="/home/user/ComDraft/assets/img/dau-huong.png">    </p:cNvPr>
           <p:cNvPicPr>
             <a:picLocks noChangeAspect="1"/>
           </p:cNvPicPr>
@@ -1902,7 +1902,7 @@
       </p:pic>
       <p:pic>
         <p:nvPicPr>
-          <p:cNvPr id="4" name="Image 1" descr="/home/user/comdraft/assets/img/lockup-huong.png">    </p:cNvPr>
+          <p:cNvPr id="4" name="Image 1" descr="/home/user/ComDraft/assets/img/lockup-huong.png">    </p:cNvPr>
           <p:cNvPicPr>
             <a:picLocks noChangeAspect="1"/>
           </p:cNvPicPr>
@@ -2160,30 +2160,6 @@
           </a:p>
         </p:txBody>
       </p:sp>
-      <p:pic>
-        <p:nvPicPr>
-          <p:cNvPr id="11" name="Picture 10" descr="co-huong-doc.png"/>
-          <p:cNvPicPr>
-            <a:picLocks noChangeAspect="1"/>
-          </p:cNvPicPr>
-          <p:nvPr/>
-        </p:nvPicPr>
-        <p:blipFill>
-          <a:blip r:embed="rId5"/>
-          <a:stretch>
-            <a:fillRect/>
-          </a:stretch>
-        </p:blipFill>
-        <p:spPr>
-          <a:xfrm>
-            <a:off x="8641080" y="1051560"/>
-            <a:ext cx="3279624" cy="5120640"/>
-          </a:xfrm>
-          <a:prstGeom prst="rect">
-            <a:avLst/>
-          </a:prstGeom>
-        </p:spPr>
-      </p:pic>
     </p:spTree>
   </p:cSld>
   <p:clrMapOvr>
@@ -2218,7 +2194,7 @@
       </p:grpSpPr>
       <p:pic>
         <p:nvPicPr>
-          <p:cNvPr id="2" name="Image 0" descr="/home/user/comdraft/assets/img/dau-huong.png">    </p:cNvPr>
+          <p:cNvPr id="2" name="Image 0" descr="/home/user/ComDraft/assets/img/dau-huong.png">    </p:cNvPr>
           <p:cNvPicPr>
             <a:picLocks noChangeAspect="1"/>
           </p:cNvPicPr>
@@ -2754,7 +2730,7 @@
       </p:grpSpPr>
       <p:pic>
         <p:nvPicPr>
-          <p:cNvPr id="2" name="Image 0" descr="/home/user/comdraft/assets/img/dau-huong.png">    </p:cNvPr>
+          <p:cNvPr id="2" name="Image 0" descr="/home/user/ComDraft/assets/img/dau-huong.png">    </p:cNvPr>
           <p:cNvPicPr>
             <a:picLocks noChangeAspect="1"/>
           </p:cNvPicPr>
@@ -3290,7 +3266,7 @@
       </p:grpSpPr>
       <p:pic>
         <p:nvPicPr>
-          <p:cNvPr id="2" name="Image 0" descr="/home/user/comdraft/assets/img/dau-huong.png">    </p:cNvPr>
+          <p:cNvPr id="2" name="Image 0" descr="/home/user/ComDraft/assets/img/dau-huong.png">    </p:cNvPr>
           <p:cNvPicPr>
             <a:picLocks noChangeAspect="1"/>
           </p:cNvPicPr>
@@ -3913,7 +3889,7 @@
       </p:grpSpPr>
       <p:pic>
         <p:nvPicPr>
-          <p:cNvPr id="2" name="Image 0" descr="/home/user/comdraft/assets/img/dau-huong.png">    </p:cNvPr>
+          <p:cNvPr id="2" name="Image 0" descr="/home/user/ComDraft/assets/img/dau-huong.png">    </p:cNvPr>
           <p:cNvPicPr>
             <a:picLocks noChangeAspect="1"/>
           </p:cNvPicPr>
@@ -4420,7 +4396,7 @@
       </p:grpSpPr>
       <p:pic>
         <p:nvPicPr>
-          <p:cNvPr id="2" name="Image 0" descr="/home/user/comdraft/assets/img/dau-huong.png">    </p:cNvPr>
+          <p:cNvPr id="2" name="Image 0" descr="/home/user/ComDraft/assets/img/dau-huong.png">    </p:cNvPr>
           <p:cNvPicPr>
             <a:picLocks noChangeAspect="1"/>
           </p:cNvPicPr>
@@ -5230,7 +5206,7 @@
       </p:grpSpPr>
       <p:pic>
         <p:nvPicPr>
-          <p:cNvPr id="2" name="Image 0" descr="/home/user/comdraft/assets/img/dau-huong.png">    </p:cNvPr>
+          <p:cNvPr id="2" name="Image 0" descr="/home/user/ComDraft/assets/img/dau-huong.png">    </p:cNvPr>
           <p:cNvPicPr>
             <a:picLocks noChangeAspect="1"/>
           </p:cNvPicPr>
@@ -5564,7 +5540,7 @@
       </p:grpSpPr>
       <p:pic>
         <p:nvPicPr>
-          <p:cNvPr id="2" name="Image 0" descr="/home/user/comdraft/assets/img/dau-huong.png">    </p:cNvPr>
+          <p:cNvPr id="2" name="Image 0" descr="/home/user/ComDraft/assets/img/dau-huong.png">    </p:cNvPr>
           <p:cNvPicPr>
             <a:picLocks noChangeAspect="1"/>
           </p:cNvPicPr>
@@ -5863,7 +5839,7 @@
       </p:grpSpPr>
       <p:pic>
         <p:nvPicPr>
-          <p:cNvPr id="2" name="Image 0" descr="/home/user/comdraft/assets/img/dau-huong.png">    </p:cNvPr>
+          <p:cNvPr id="2" name="Image 0" descr="/home/user/ComDraft/assets/img/dau-huong.png">    </p:cNvPr>
           <p:cNvPicPr>
             <a:picLocks noChangeAspect="1"/>
           </p:cNvPicPr>
@@ -6486,7 +6462,7 @@
       </p:grpSpPr>
       <p:pic>
         <p:nvPicPr>
-          <p:cNvPr id="2" name="Image 0" descr="/home/user/comdraft/assets/img/dau-huong.png">    </p:cNvPr>
+          <p:cNvPr id="2" name="Image 0" descr="/home/user/ComDraft/assets/img/dau-huong.png">    </p:cNvPr>
           <p:cNvPicPr>
             <a:picLocks noChangeAspect="1"/>
           </p:cNvPicPr>
@@ -7577,7 +7553,7 @@
       </p:grpSpPr>
       <p:pic>
         <p:nvPicPr>
-          <p:cNvPr id="2" name="Image 0" descr="/home/user/comdraft/assets/img/dau-huong.png">    </p:cNvPr>
+          <p:cNvPr id="2" name="Image 0" descr="/home/user/ComDraft/assets/img/dau-huong.png">    </p:cNvPr>
           <p:cNvPicPr>
             <a:picLocks noChangeAspect="1"/>
           </p:cNvPicPr>
@@ -8250,30 +8226,6 @@
           </a:p>
         </p:txBody>
       </p:sp>
-      <p:pic>
-        <p:nvPicPr>
-          <p:cNvPr id="21" name="Picture 20" descr="co-huong-tron.png"/>
-          <p:cNvPicPr>
-            <a:picLocks noChangeAspect="1"/>
-          </p:cNvPicPr>
-          <p:nvPr/>
-        </p:nvPicPr>
-        <p:blipFill>
-          <a:blip r:embed="rId4"/>
-          <a:stretch>
-            <a:fillRect/>
-          </a:stretch>
-        </p:blipFill>
-        <p:spPr>
-          <a:xfrm>
-            <a:off x="10378440" y="384048"/>
-            <a:ext cx="960120" cy="960120"/>
-          </a:xfrm>
-          <a:prstGeom prst="rect">
-            <a:avLst/>
-          </a:prstGeom>
-        </p:spPr>
-      </p:pic>
     </p:spTree>
   </p:cSld>
   <p:clrMapOvr>
